--- a/HDFC_AI_Digital_Banking_CaseStudy2(Prahadhesvaryaa K S).pptx
+++ b/HDFC_AI_Digital_Banking_CaseStudy2(Prahadhesvaryaa K S).pptx
@@ -1,26 +1,113 @@
 
 <file path=ppt/presentation.xml><?xml version="1.0" encoding="utf-8"?>
-<p:presentation xmlns:a="http://schemas.openxmlformats.org/drawingml/2006/main" xmlns:r="http://schemas.openxmlformats.org/officeDocument/2006/relationships" xmlns:p="http://schemas.openxmlformats.org/presentationml/2006/main" saveSubsetFonts="1">
+<p:presentation xmlns:a="http://schemas.openxmlformats.org/drawingml/2006/main" xmlns:r="http://schemas.openxmlformats.org/officeDocument/2006/relationships" xmlns:p="http://schemas.openxmlformats.org/presentationml/2006/main" saveSubsetFonts="1" autoCompressPictures="0">
   <p:sldMasterIdLst>
     <p:sldMasterId id="2147483648" r:id="rId1"/>
   </p:sldMasterIdLst>
+  <p:sldIdLst>
+    <p:sldId id="256" r:id="rId2"/>
+    <p:sldId id="257" r:id="rId3"/>
+    <p:sldId id="258" r:id="rId4"/>
+    <p:sldId id="259" r:id="rId5"/>
+    <p:sldId id="260" r:id="rId6"/>
+    <p:sldId id="261" r:id="rId7"/>
+  </p:sldIdLst>
   <p:notesMasterIdLst>
-    <p:notesMasterId r:id="rId2"/>
+    <p:notesMasterId r:id="rId8"/>
   </p:notesMasterIdLst>
-  <p:sldIdLst>
-    <p:sldId id="256" r:id="rId11"/>
-    <p:sldId id="257" r:id="rId12"/>
-    <p:sldId id="258" r:id="rId13"/>
-    <p:sldId id="259" r:id="rId14"/>
-    <p:sldId id="260" r:id="rId15"/>
-    <p:sldId id="261" r:id="rId16"/>
-  </p:sldIdLst>
   <p:sldSz cx="12192000" cy="6858000"/>
-  <p:notesSz cx="6858000" cy="9144000"/>
+  <p:notesSz cx="6858000" cy="12192000"/>
   <p:defaultTextStyle>
-    <a:defPPr>
-      <a:defRPr lang="en-IN"/>
-    </a:defPPr>
+    <a:lvl1pPr marL="0" algn="l" defTabSz="914400" rtl="0" eaLnBrk="1" latinLnBrk="0" hangingPunct="1">
+      <a:defRPr sz="1800" kern="1200">
+        <a:solidFill>
+          <a:schemeClr val="tx1"/>
+        </a:solidFill>
+        <a:latin typeface="+mn-lt"/>
+        <a:ea typeface="+mn-ea"/>
+        <a:cs typeface="+mn-cs"/>
+      </a:defRPr>
+    </a:lvl1pPr>
+    <a:lvl2pPr marL="457200" algn="l" defTabSz="914400" rtl="0" eaLnBrk="1" latinLnBrk="0" hangingPunct="1">
+      <a:defRPr sz="1800" kern="1200">
+        <a:solidFill>
+          <a:schemeClr val="tx1"/>
+        </a:solidFill>
+        <a:latin typeface="+mn-lt"/>
+        <a:ea typeface="+mn-ea"/>
+        <a:cs typeface="+mn-cs"/>
+      </a:defRPr>
+    </a:lvl2pPr>
+    <a:lvl3pPr marL="914400" algn="l" defTabSz="914400" rtl="0" eaLnBrk="1" latinLnBrk="0" hangingPunct="1">
+      <a:defRPr sz="1800" kern="1200">
+        <a:solidFill>
+          <a:schemeClr val="tx1"/>
+        </a:solidFill>
+        <a:latin typeface="+mn-lt"/>
+        <a:ea typeface="+mn-ea"/>
+        <a:cs typeface="+mn-cs"/>
+      </a:defRPr>
+    </a:lvl3pPr>
+    <a:lvl4pPr marL="1371600" algn="l" defTabSz="914400" rtl="0" eaLnBrk="1" latinLnBrk="0" hangingPunct="1">
+      <a:defRPr sz="1800" kern="1200">
+        <a:solidFill>
+          <a:schemeClr val="tx1"/>
+        </a:solidFill>
+        <a:latin typeface="+mn-lt"/>
+        <a:ea typeface="+mn-ea"/>
+        <a:cs typeface="+mn-cs"/>
+      </a:defRPr>
+    </a:lvl4pPr>
+    <a:lvl5pPr marL="1828800" algn="l" defTabSz="914400" rtl="0" eaLnBrk="1" latinLnBrk="0" hangingPunct="1">
+      <a:defRPr sz="1800" kern="1200">
+        <a:solidFill>
+          <a:schemeClr val="tx1"/>
+        </a:solidFill>
+        <a:latin typeface="+mn-lt"/>
+        <a:ea typeface="+mn-ea"/>
+        <a:cs typeface="+mn-cs"/>
+      </a:defRPr>
+    </a:lvl5pPr>
+    <a:lvl6pPr marL="2286000" algn="l" defTabSz="914400" rtl="0" eaLnBrk="1" latinLnBrk="0" hangingPunct="1">
+      <a:defRPr sz="1800" kern="1200">
+        <a:solidFill>
+          <a:schemeClr val="tx1"/>
+        </a:solidFill>
+        <a:latin typeface="+mn-lt"/>
+        <a:ea typeface="+mn-ea"/>
+        <a:cs typeface="+mn-cs"/>
+      </a:defRPr>
+    </a:lvl6pPr>
+    <a:lvl7pPr marL="2743200" algn="l" defTabSz="914400" rtl="0" eaLnBrk="1" latinLnBrk="0" hangingPunct="1">
+      <a:defRPr sz="1800" kern="1200">
+        <a:solidFill>
+          <a:schemeClr val="tx1"/>
+        </a:solidFill>
+        <a:latin typeface="+mn-lt"/>
+        <a:ea typeface="+mn-ea"/>
+        <a:cs typeface="+mn-cs"/>
+      </a:defRPr>
+    </a:lvl7pPr>
+    <a:lvl8pPr marL="3200400" algn="l" defTabSz="914400" rtl="0" eaLnBrk="1" latinLnBrk="0" hangingPunct="1">
+      <a:defRPr sz="1800" kern="1200">
+        <a:solidFill>
+          <a:schemeClr val="tx1"/>
+        </a:solidFill>
+        <a:latin typeface="+mn-lt"/>
+        <a:ea typeface="+mn-ea"/>
+        <a:cs typeface="+mn-cs"/>
+      </a:defRPr>
+    </a:lvl8pPr>
+    <a:lvl9pPr marL="3657600" algn="l" defTabSz="914400" rtl="0" eaLnBrk="1" latinLnBrk="0" hangingPunct="1">
+      <a:defRPr sz="1800" kern="1200">
+        <a:solidFill>
+          <a:schemeClr val="tx1"/>
+        </a:solidFill>
+        <a:latin typeface="+mn-lt"/>
+        <a:ea typeface="+mn-ea"/>
+        <a:cs typeface="+mn-cs"/>
+      </a:defRPr>
+    </a:lvl9pPr>
   </p:defaultTextStyle>
 </p:presentation>
 </file>
@@ -29,12 +116,9 @@
 <p:notesMaster xmlns:a="http://schemas.openxmlformats.org/drawingml/2006/main" xmlns:r="http://schemas.openxmlformats.org/officeDocument/2006/relationships" xmlns:p="http://schemas.openxmlformats.org/presentationml/2006/main">
   <p:cSld>
     <p:bg>
-      <p:bgPr>
-        <a:solidFill>
-          <a:srgbClr val="FFFFFF"/>
-        </a:solidFill>
-        <a:effectLst/>
-      </p:bgPr>
+      <p:bgRef idx="1001">
+        <a:schemeClr val="bg1"/>
+      </p:bgRef>
     </p:bg>
     <p:spTree>
       <p:nvGrpSpPr>
@@ -52,18 +136,84 @@
       </p:grpSpPr>
       <p:sp>
         <p:nvSpPr>
-          <p:cNvPr id="2" name="Slide Image Placeholder 1"/>
+          <p:cNvPr id="2" name="Header Placeholder 1"/>
+          <p:cNvSpPr>
+            <a:spLocks noGrp="1"/>
+          </p:cNvSpPr>
+          <p:nvPr>
+            <p:ph type="hdr" sz="quarter"/>
+          </p:nvPr>
+        </p:nvSpPr>
+        <p:spPr>
+          <a:xfrm>
+            <a:off x="0" y="0"/>
+            <a:ext cx="2971800" cy="458788"/>
+          </a:xfrm>
+          <a:prstGeom prst="rect">
+            <a:avLst/>
+          </a:prstGeom>
+        </p:spPr>
+        <p:txBody>
+          <a:bodyPr vert="horz" lIns="91440" tIns="45720" rIns="91440" bIns="45720" rtlCol="0"/>
+          <a:lstStyle>
+            <a:lvl1pPr algn="l">
+              <a:defRPr sz="1200"/>
+            </a:lvl1pPr>
+          </a:lstStyle>
+          <a:p>
+            <a:endParaRPr lang="en-US"/>
+          </a:p>
+        </p:txBody>
+      </p:sp>
+      <p:sp>
+        <p:nvSpPr>
+          <p:cNvPr id="3" name="Date Placeholder 2"/>
+          <p:cNvSpPr>
+            <a:spLocks noGrp="1"/>
+          </p:cNvSpPr>
+          <p:nvPr>
+            <p:ph type="dt" idx="1"/>
+          </p:nvPr>
+        </p:nvSpPr>
+        <p:spPr>
+          <a:xfrm>
+            <a:off x="3884613" y="0"/>
+            <a:ext cx="2971800" cy="458788"/>
+          </a:xfrm>
+          <a:prstGeom prst="rect">
+            <a:avLst/>
+          </a:prstGeom>
+        </p:spPr>
+        <p:txBody>
+          <a:bodyPr vert="horz" lIns="91440" tIns="45720" rIns="91440" bIns="45720" rtlCol="0"/>
+          <a:lstStyle>
+            <a:lvl1pPr algn="r">
+              <a:defRPr sz="1200"/>
+            </a:lvl1pPr>
+          </a:lstStyle>
+          <a:p>
+            <a:fld id="{5282F153-3F37-0F45-9E97-73ACFA13230C}" type="datetimeFigureOut">
+              <a:rPr lang="en-US"/>
+              <a:t>7/23/19</a:t>
+            </a:fld>
+            <a:endParaRPr lang="en-US"/>
+          </a:p>
+        </p:txBody>
+      </p:sp>
+      <p:sp>
+        <p:nvSpPr>
+          <p:cNvPr id="4" name="Slide Image Placeholder 3"/>
           <p:cNvSpPr>
             <a:spLocks noGrp="1" noRot="1" noChangeAspect="1"/>
           </p:cNvSpPr>
           <p:nvPr>
-            <p:ph type="sldImg"/>
+            <p:ph type="sldImg" idx="2"/>
           </p:nvPr>
         </p:nvSpPr>
         <p:spPr>
           <a:xfrm>
-            <a:off x="857250" y="685800"/>
-            <a:ext cx="5143500" cy="2914650"/>
+            <a:off x="685800" y="1143000"/>
+            <a:ext cx="5486400" cy="3086100"/>
           </a:xfrm>
           <a:prstGeom prst="rect">
             <a:avLst/>
@@ -71,48 +221,149 @@
           <a:noFill/>
           <a:ln w="12700">
             <a:solidFill>
-              <a:srgbClr val="000000"/>
+              <a:prstClr val="black"/>
             </a:solidFill>
           </a:ln>
         </p:spPr>
         <p:txBody>
-          <a:bodyPr/>
-          <a:lstStyle/>
-          <a:p>
-            <a:endParaRPr lang="en-IN"/>
-          </a:p>
-        </p:txBody>
-      </p:sp>
-      <p:sp>
-        <p:nvSpPr>
-          <p:cNvPr id="3" name="Notes Placeholder 2"/>
+          <a:bodyPr vert="horz" lIns="91440" tIns="45720" rIns="91440" bIns="45720" rtlCol="0" anchor="ctr"/>
+          <a:lstStyle/>
+          <a:p>
+            <a:endParaRPr lang="en-US"/>
+          </a:p>
+        </p:txBody>
+      </p:sp>
+      <p:sp>
+        <p:nvSpPr>
+          <p:cNvPr id="5" name="Notes Placeholder 4"/>
           <p:cNvSpPr>
             <a:spLocks noGrp="1"/>
           </p:cNvSpPr>
           <p:nvPr>
-            <p:ph type="body" idx="1"/>
+            <p:ph type="body" sz="quarter" idx="3"/>
           </p:nvPr>
         </p:nvSpPr>
         <p:spPr>
           <a:xfrm>
-            <a:off x="685800" y="3884613"/>
-            <a:ext cx="5486400" cy="4114800"/>
-          </a:xfrm>
-          <a:prstGeom prst="rect">
-            <a:avLst/>
-          </a:prstGeom>
-        </p:spPr>
-        <p:txBody>
-          <a:bodyPr vert="horz" lIns="91440" tIns="45720" rIns="91440" bIns="45720" rtlCol="0">
-            <a:normAutofit/>
-          </a:bodyPr>
-          <a:lstStyle/>
-          <a:p>
-            <a:endParaRPr lang="en-IN"/>
+            <a:off x="685800" y="4400550"/>
+            <a:ext cx="5486400" cy="3600450"/>
+          </a:xfrm>
+          <a:prstGeom prst="rect">
+            <a:avLst/>
+          </a:prstGeom>
+        </p:spPr>
+        <p:txBody>
+          <a:bodyPr vert="horz" lIns="91440" tIns="45720" rIns="91440" bIns="45720" rtlCol="0"/>
+          <a:lstStyle/>
+          <a:p>
+            <a:pPr lvl="0"/>
+            <a:r>
+              <a:rPr lang="en-US"/>
+              <a:t>Click to edit Master text styles</a:t>
+            </a:r>
+          </a:p>
+          <a:p>
+            <a:pPr lvl="1"/>
+            <a:r>
+              <a:rPr lang="en-US"/>
+              <a:t>Second level</a:t>
+            </a:r>
+          </a:p>
+          <a:p>
+            <a:pPr lvl="2"/>
+            <a:r>
+              <a:rPr lang="en-US"/>
+              <a:t>Third level</a:t>
+            </a:r>
+          </a:p>
+          <a:p>
+            <a:pPr lvl="3"/>
+            <a:r>
+              <a:rPr lang="en-US"/>
+              <a:t>Fourth level</a:t>
+            </a:r>
+          </a:p>
+          <a:p>
+            <a:pPr lvl="4"/>
+            <a:r>
+              <a:rPr lang="en-US"/>
+              <a:t>Fifth level</a:t>
+            </a:r>
+          </a:p>
+        </p:txBody>
+      </p:sp>
+      <p:sp>
+        <p:nvSpPr>
+          <p:cNvPr id="6" name="Footer Placeholder 5"/>
+          <p:cNvSpPr>
+            <a:spLocks noGrp="1"/>
+          </p:cNvSpPr>
+          <p:nvPr>
+            <p:ph type="ftr" sz="quarter" idx="4"/>
+          </p:nvPr>
+        </p:nvSpPr>
+        <p:spPr>
+          <a:xfrm>
+            <a:off x="0" y="8685213"/>
+            <a:ext cx="2971800" cy="458787"/>
+          </a:xfrm>
+          <a:prstGeom prst="rect">
+            <a:avLst/>
+          </a:prstGeom>
+        </p:spPr>
+        <p:txBody>
+          <a:bodyPr vert="horz" lIns="91440" tIns="45720" rIns="91440" bIns="45720" rtlCol="0" anchor="b"/>
+          <a:lstStyle>
+            <a:lvl1pPr algn="l">
+              <a:defRPr sz="1200"/>
+            </a:lvl1pPr>
+          </a:lstStyle>
+          <a:p>
+            <a:endParaRPr lang="en-US"/>
+          </a:p>
+        </p:txBody>
+      </p:sp>
+      <p:sp>
+        <p:nvSpPr>
+          <p:cNvPr id="7" name="Slide Number Placeholder 6"/>
+          <p:cNvSpPr>
+            <a:spLocks noGrp="1"/>
+          </p:cNvSpPr>
+          <p:nvPr>
+            <p:ph type="sldNum" sz="quarter" idx="5"/>
+          </p:nvPr>
+        </p:nvSpPr>
+        <p:spPr>
+          <a:xfrm>
+            <a:off x="3884613" y="8685213"/>
+            <a:ext cx="2971800" cy="458787"/>
+          </a:xfrm>
+          <a:prstGeom prst="rect">
+            <a:avLst/>
+          </a:prstGeom>
+        </p:spPr>
+        <p:txBody>
+          <a:bodyPr vert="horz" lIns="91440" tIns="45720" rIns="91440" bIns="45720" rtlCol="0" anchor="b"/>
+          <a:lstStyle>
+            <a:lvl1pPr algn="r">
+              <a:defRPr sz="1200"/>
+            </a:lvl1pPr>
+          </a:lstStyle>
+          <a:p>
+            <a:fld id="{CE5E9CC1-C706-0F49-92D6-E571CC5EEA8F}" type="slidenum">
+              <a:rPr lang="en-US"/>
+              <a:t>‹#›</a:t>
+            </a:fld>
+            <a:endParaRPr lang="en-US"/>
           </a:p>
         </p:txBody>
       </p:sp>
     </p:spTree>
+    <p:extLst>
+      <p:ext uri="{BB962C8B-B14F-4D97-AF65-F5344CB8AC3E}">
+        <p14:creationId xmlns:p14="http://schemas.microsoft.com/office/powerpoint/2010/main" val="1024086991"/>
+      </p:ext>
+    </p:extLst>
   </p:cSld>
   <p:clrMap bg1="lt1" tx1="dk1" bg2="lt2" tx2="dk2" accent1="accent1" accent2="accent2" accent3="accent3" accent4="accent4" accent5="accent5" accent6="accent6" hlink="hlink" folHlink="folHlink"/>
   <p:notesStyle>
@@ -122,6 +373,8 @@
           <a:schemeClr val="tx1"/>
         </a:solidFill>
         <a:latin typeface="+mn-lt"/>
+        <a:ea typeface="+mn-ea"/>
+        <a:cs typeface="+mn-cs"/>
       </a:defRPr>
     </a:lvl1pPr>
     <a:lvl2pPr marL="457200" algn="l" defTabSz="914400" rtl="0" eaLnBrk="1" latinLnBrk="0" hangingPunct="1">
@@ -130,6 +383,8 @@
           <a:schemeClr val="tx1"/>
         </a:solidFill>
         <a:latin typeface="+mn-lt"/>
+        <a:ea typeface="+mn-ea"/>
+        <a:cs typeface="+mn-cs"/>
       </a:defRPr>
     </a:lvl2pPr>
     <a:lvl3pPr marL="914400" algn="l" defTabSz="914400" rtl="0" eaLnBrk="1" latinLnBrk="0" hangingPunct="1">
@@ -138,6 +393,8 @@
           <a:schemeClr val="tx1"/>
         </a:solidFill>
         <a:latin typeface="+mn-lt"/>
+        <a:ea typeface="+mn-ea"/>
+        <a:cs typeface="+mn-cs"/>
       </a:defRPr>
     </a:lvl3pPr>
     <a:lvl4pPr marL="1371600" algn="l" defTabSz="914400" rtl="0" eaLnBrk="1" latinLnBrk="0" hangingPunct="1">
@@ -146,6 +403,8 @@
           <a:schemeClr val="tx1"/>
         </a:solidFill>
         <a:latin typeface="+mn-lt"/>
+        <a:ea typeface="+mn-ea"/>
+        <a:cs typeface="+mn-cs"/>
       </a:defRPr>
     </a:lvl4pPr>
     <a:lvl5pPr marL="1828800" algn="l" defTabSz="914400" rtl="0" eaLnBrk="1" latinLnBrk="0" hangingPunct="1">
@@ -154,6 +413,8 @@
           <a:schemeClr val="tx1"/>
         </a:solidFill>
         <a:latin typeface="+mn-lt"/>
+        <a:ea typeface="+mn-ea"/>
+        <a:cs typeface="+mn-cs"/>
       </a:defRPr>
     </a:lvl5pPr>
     <a:lvl6pPr marL="2286000" algn="l" defTabSz="914400" rtl="0" eaLnBrk="1" latinLnBrk="0" hangingPunct="1">
@@ -162,6 +423,8 @@
           <a:schemeClr val="tx1"/>
         </a:solidFill>
         <a:latin typeface="+mn-lt"/>
+        <a:ea typeface="+mn-ea"/>
+        <a:cs typeface="+mn-cs"/>
       </a:defRPr>
     </a:lvl6pPr>
     <a:lvl7pPr marL="2743200" algn="l" defTabSz="914400" rtl="0" eaLnBrk="1" latinLnBrk="0" hangingPunct="1">
@@ -170,6 +433,8 @@
           <a:schemeClr val="tx1"/>
         </a:solidFill>
         <a:latin typeface="+mn-lt"/>
+        <a:ea typeface="+mn-ea"/>
+        <a:cs typeface="+mn-cs"/>
       </a:defRPr>
     </a:lvl7pPr>
     <a:lvl8pPr marL="3200400" algn="l" defTabSz="914400" rtl="0" eaLnBrk="1" latinLnBrk="0" hangingPunct="1">
@@ -178,6 +443,8 @@
           <a:schemeClr val="tx1"/>
         </a:solidFill>
         <a:latin typeface="+mn-lt"/>
+        <a:ea typeface="+mn-ea"/>
+        <a:cs typeface="+mn-cs"/>
       </a:defRPr>
     </a:lvl8pPr>
     <a:lvl9pPr marL="3657600" algn="l" defTabSz="914400" rtl="0" eaLnBrk="1" latinLnBrk="0" hangingPunct="1">
@@ -186,6 +453,8 @@
           <a:schemeClr val="tx1"/>
         </a:solidFill>
         <a:latin typeface="+mn-lt"/>
+        <a:ea typeface="+mn-ea"/>
+        <a:cs typeface="+mn-cs"/>
       </a:defRPr>
     </a:lvl9pPr>
   </p:notesStyle>
@@ -220,13 +489,6 @@
           </p:nvPr>
         </p:nvSpPr>
         <p:spPr/>
-        <p:txBody>
-          <a:bodyPr/>
-          <a:lstStyle/>
-          <a:p>
-            <a:endParaRPr lang="en-IN"/>
-          </a:p>
-        </p:txBody>
       </p:sp>
       <p:sp>
         <p:nvSpPr>
@@ -240,28 +502,23 @@
         </p:nvSpPr>
         <p:spPr/>
         <p:txBody>
-          <a:bodyPr>
-            <a:normAutofit/>
-          </a:bodyPr>
-          <a:lstStyle/>
-          <a:p>
-            <a:pPr algn="l"/>
-            <a:r>
-              <a:rPr lang="en-IN" sz="1200" dirty="0"/>
+          <a:bodyPr/>
+          <a:lstStyle/>
+          <a:p>
+            <a:r>
+              <a:rPr lang="en-IN" dirty="0"/>
               <a:t>Open by naming the four AI capabilities the case covers: RPA, chatbots, PaaS and adaptive fraud prevention.</a:t>
             </a:r>
           </a:p>
           <a:p>
-            <a:pPr algn="l"/>
-            <a:r>
-              <a:rPr lang="en-IN" sz="1200" dirty="0"/>
+            <a:r>
+              <a:rPr lang="en-IN" dirty="0"/>
               <a:t>One-line framing: HDFC uses AI to make digital banking faster, safer and more convenient - the deck takes each of those in turn.</a:t>
             </a:r>
           </a:p>
           <a:p>
-            <a:pPr algn="l"/>
-            <a:r>
-              <a:rPr lang="en-IN" sz="1200" dirty="0"/>
+            <a:r>
+              <a:rPr lang="en-IN" dirty="0"/>
               <a:t>Introduce yourself and your register number, then move on. Around 20 seconds.</a:t>
             </a:r>
           </a:p>
@@ -303,13 +560,6 @@
           </p:nvPr>
         </p:nvSpPr>
         <p:spPr/>
-        <p:txBody>
-          <a:bodyPr/>
-          <a:lstStyle/>
-          <a:p>
-            <a:endParaRPr lang="en-IN"/>
-          </a:p>
-        </p:txBody>
       </p:sp>
       <p:sp>
         <p:nvSpPr>
@@ -323,35 +573,29 @@
         </p:nvSpPr>
         <p:spPr/>
         <p:txBody>
-          <a:bodyPr>
-            <a:normAutofit/>
-          </a:bodyPr>
-          <a:lstStyle/>
-          <a:p>
-            <a:pPr algn="l"/>
-            <a:r>
-              <a:rPr lang="en-IN" sz="1200" dirty="0"/>
+          <a:bodyPr/>
+          <a:lstStyle/>
+          <a:p>
+            <a:r>
+              <a:rPr lang="en-IN" dirty="0"/>
               <a:t>RPA first. The point is that KYC is a rules job, not a judgement job - read the ID, match it to a government database, open the account. Ten seconds instead of days.</a:t>
             </a:r>
           </a:p>
           <a:p>
-            <a:pPr algn="l"/>
-            <a:r>
-              <a:rPr lang="en-IN" sz="1200" dirty="0"/>
+            <a:r>
+              <a:rPr lang="en-IN" dirty="0"/>
               <a:t>Chatbots second. The example to use is the 2 AM lost card: the loss does not wait for business hours, so neither should the block.</a:t>
             </a:r>
           </a:p>
           <a:p>
-            <a:pPr algn="l"/>
-            <a:r>
-              <a:rPr lang="en-IN" sz="1200" dirty="0"/>
+            <a:r>
+              <a:rPr lang="en-IN" dirty="0"/>
               <a:t>Tie them together with the line in the subtitle: both remove human latency from high-volume, rule-based, time-critical work.</a:t>
             </a:r>
           </a:p>
           <a:p>
-            <a:pPr algn="l"/>
-            <a:r>
-              <a:rPr lang="en-IN" sz="1200" dirty="0"/>
+            <a:r>
+              <a:rPr lang="en-IN" dirty="0"/>
               <a:t>If asked what is left for humans: exceptions, disputes and anything needing judgement or empathy.</a:t>
             </a:r>
           </a:p>
@@ -393,13 +637,6 @@
           </p:nvPr>
         </p:nvSpPr>
         <p:spPr/>
-        <p:txBody>
-          <a:bodyPr/>
-          <a:lstStyle/>
-          <a:p>
-            <a:endParaRPr lang="en-IN"/>
-          </a:p>
-        </p:txBody>
       </p:sp>
       <p:sp>
         <p:nvSpPr>
@@ -413,35 +650,29 @@
         </p:nvSpPr>
         <p:spPr/>
         <p:txBody>
-          <a:bodyPr>
-            <a:normAutofit/>
-          </a:bodyPr>
-          <a:lstStyle/>
-          <a:p>
-            <a:pPr algn="l"/>
-            <a:r>
-              <a:rPr lang="en-IN" sz="1200" dirty="0"/>
+          <a:bodyPr/>
+          <a:lstStyle/>
+          <a:p>
+            <a:r>
+              <a:rPr lang="en-IN" dirty="0"/>
               <a:t>Define PaaS in one sentence: the vendor hands over a ready-made environment, and you bring only your code.</a:t>
             </a:r>
           </a:p>
           <a:p>
-            <a:pPr algn="l"/>
-            <a:r>
-              <a:rPr lang="en-IN" sz="1200" dirty="0"/>
+            <a:r>
+              <a:rPr lang="en-IN" dirty="0"/>
               <a:t>Use the stack on the right to make it concrete - hardware, operating system, servers and software tools all arrive pre-assembled.</a:t>
             </a:r>
           </a:p>
           <a:p>
-            <a:pPr algn="l"/>
-            <a:r>
-              <a:rPr lang="en-IN" sz="1200" dirty="0"/>
+            <a:r>
+              <a:rPr lang="en-IN" dirty="0"/>
               <a:t>The 'where the time goes' comparison is the part to linger on: without PaaS the first three steps are pure setup that produces nothing a customer can see.</a:t>
             </a:r>
           </a:p>
           <a:p>
-            <a:pPr algn="l"/>
-            <a:r>
-              <a:rPr lang="en-IN" sz="1200" dirty="0"/>
+            <a:r>
+              <a:rPr lang="en-IN" dirty="0"/>
               <a:t>If asked how PaaS differs from IaaS and SaaS: IaaS gives you raw machines, SaaS gives you finished software, PaaS sits in between - you write the application, the vendor runs everything below it.</a:t>
             </a:r>
           </a:p>
@@ -483,13 +714,6 @@
           </p:nvPr>
         </p:nvSpPr>
         <p:spPr/>
-        <p:txBody>
-          <a:bodyPr/>
-          <a:lstStyle/>
-          <a:p>
-            <a:endParaRPr lang="en-IN"/>
-          </a:p>
-        </p:txBody>
       </p:sp>
       <p:sp>
         <p:nvSpPr>
@@ -503,42 +727,35 @@
         </p:nvSpPr>
         <p:spPr/>
         <p:txBody>
-          <a:bodyPr>
-            <a:normAutofit/>
-          </a:bodyPr>
-          <a:lstStyle/>
-          <a:p>
-            <a:pPr algn="l"/>
-            <a:r>
-              <a:rPr lang="en-IN" sz="1200" dirty="0"/>
+          <a:bodyPr/>
+          <a:lstStyle/>
+          <a:p>
+            <a:r>
+              <a:rPr lang="en-IN" dirty="0"/>
               <a:t>Three benefits, one per card. Keep each to about fifteen seconds.</a:t>
             </a:r>
           </a:p>
           <a:p>
-            <a:pPr algn="l"/>
-            <a:r>
-              <a:rPr lang="en-IN" sz="1200" dirty="0"/>
+            <a:r>
+              <a:rPr lang="en-IN" dirty="0"/>
               <a:t>Benefit 1 is speed - the AI engines already exist, so HDFC starts from a working platform rather than from nothing.</a:t>
             </a:r>
           </a:p>
           <a:p>
-            <a:pPr algn="l"/>
-            <a:r>
-              <a:rPr lang="en-IN" sz="1200" dirty="0"/>
+            <a:r>
+              <a:rPr lang="en-IN" dirty="0"/>
               <a:t>Benefit 2 is the answer to an obvious objection: if every bank rents the same cloud, where is the advantage? In the custom layer - the bank's own loan algorithms.</a:t>
             </a:r>
           </a:p>
           <a:p>
-            <a:pPr algn="l"/>
-            <a:r>
-              <a:rPr lang="en-IN" sz="1200" dirty="0"/>
+            <a:r>
+              <a:rPr lang="en-IN" dirty="0"/>
               <a:t>Benefit 3 is the one an examiner will press on, because banking is regulated. The model trains inside the bank's private environment, so customer data does not leave.</a:t>
             </a:r>
           </a:p>
           <a:p>
-            <a:pPr algn="l"/>
-            <a:r>
-              <a:rPr lang="en-IN" sz="1200" dirty="0"/>
+            <a:r>
+              <a:rPr lang="en-IN" dirty="0"/>
               <a:t>The closing strip is the argument in one line: speed or control is normally a trade-off, and PaaS removes it.</a:t>
             </a:r>
           </a:p>
@@ -580,13 +797,6 @@
           </p:nvPr>
         </p:nvSpPr>
         <p:spPr/>
-        <p:txBody>
-          <a:bodyPr/>
-          <a:lstStyle/>
-          <a:p>
-            <a:endParaRPr lang="en-IN"/>
-          </a:p>
-        </p:txBody>
       </p:sp>
       <p:sp>
         <p:nvSpPr>
@@ -600,49 +810,41 @@
         </p:nvSpPr>
         <p:spPr/>
         <p:txBody>
-          <a:bodyPr>
-            <a:normAutofit/>
-          </a:bodyPr>
-          <a:lstStyle/>
-          <a:p>
-            <a:pPr algn="l"/>
-            <a:r>
-              <a:rPr lang="en-IN" sz="1200" dirty="0"/>
+          <a:bodyPr/>
+          <a:lstStyle/>
+          <a:p>
+            <a:r>
+              <a:rPr lang="en-IN" dirty="0"/>
               <a:t>This is the diagram slide. Walk it top to bottom, then left to right.</a:t>
             </a:r>
           </a:p>
           <a:p>
-            <a:pPr algn="l"/>
-            <a:r>
-              <a:rPr lang="en-IN" sz="1200" dirty="0"/>
+            <a:r>
+              <a:rPr lang="en-IN" dirty="0"/>
               <a:t>Top: a transaction is triggered and the AI engine scans it in real time. Nothing is pre-judged.</a:t>
             </a:r>
           </a:p>
           <a:p>
-            <a:pPr algn="l"/>
-            <a:r>
-              <a:rPr lang="en-IN" sz="1200" dirty="0"/>
+            <a:r>
+              <a:rPr lang="en-IN" dirty="0"/>
               <a:t>The engine outputs a single number - a risk score from 0 to 100 - based on how unusual the payment looks for that customer.</a:t>
             </a:r>
           </a:p>
           <a:p>
-            <a:pPr algn="l"/>
-            <a:r>
-              <a:rPr lang="en-IN" sz="1200" dirty="0"/>
+            <a:r>
+              <a:rPr lang="en-IN" dirty="0"/>
               <a:t>Then the three paths. Low risk 0 to 30 is approved instantly. Medium risk 31 to 70 gets a step-up check, biometric or OTP. High risk 71 to 100 is temporarily blocked and reviewed by a human.</a:t>
             </a:r>
           </a:p>
           <a:p>
-            <a:pPr algn="l"/>
-            <a:r>
-              <a:rPr lang="en-IN" sz="1200" dirty="0"/>
+            <a:r>
+              <a:rPr lang="en-IN" dirty="0"/>
               <a:t>The word to emphasise is 'adaptive' - the friction matches the risk, so a normal customer never feels the security.</a:t>
             </a:r>
           </a:p>
           <a:p>
-            <a:pPr algn="l"/>
-            <a:r>
-              <a:rPr lang="en-IN" sz="1200" dirty="0"/>
+            <a:r>
+              <a:rPr lang="en-IN" dirty="0"/>
               <a:t>Likely question: what happens at the boundaries? The thresholds are tunable, and banks tighten or loosen them as fraud patterns shift.</a:t>
             </a:r>
           </a:p>
@@ -684,13 +886,6 @@
           </p:nvPr>
         </p:nvSpPr>
         <p:spPr/>
-        <p:txBody>
-          <a:bodyPr/>
-          <a:lstStyle/>
-          <a:p>
-            <a:endParaRPr lang="en-IN"/>
-          </a:p>
-        </p:txBody>
       </p:sp>
       <p:sp>
         <p:nvSpPr>
@@ -704,35 +899,29 @@
         </p:nvSpPr>
         <p:spPr/>
         <p:txBody>
-          <a:bodyPr>
-            <a:normAutofit/>
-          </a:bodyPr>
-          <a:lstStyle/>
-          <a:p>
-            <a:pPr algn="l"/>
-            <a:r>
-              <a:rPr lang="en-IN" sz="1200" dirty="0"/>
+          <a:bodyPr/>
+          <a:lstStyle/>
+          <a:p>
+            <a:r>
+              <a:rPr lang="en-IN" dirty="0"/>
               <a:t>Recap the four capabilities in one line each, then land the three outcomes: faster, safer, more convenient.</a:t>
             </a:r>
           </a:p>
           <a:p>
-            <a:pPr algn="l"/>
-            <a:r>
-              <a:rPr lang="en-IN" sz="1200" dirty="0"/>
+            <a:r>
+              <a:rPr lang="en-IN" dirty="0"/>
               <a:t>The connecting idea, if you want a strong closing sentence: RPA and chatbots change the speed of banking, PaaS changes how quickly the bank can build, and adaptive fraud prevention changes how safely it can grow.</a:t>
             </a:r>
           </a:p>
           <a:p>
-            <a:pPr algn="l"/>
-            <a:r>
-              <a:rPr lang="en-IN" sz="1200" dirty="0"/>
+            <a:r>
+              <a:rPr lang="en-IN" dirty="0"/>
               <a:t>Then stop and invite questions.</a:t>
             </a:r>
           </a:p>
           <a:p>
-            <a:pPr algn="l"/>
-            <a:r>
-              <a:rPr lang="en-IN" sz="1200" dirty="0"/>
+            <a:r>
+              <a:rPr lang="en-IN" dirty="0"/>
               <a:t>Prepared answers: PaaS versus IaaS and SaaS; what happens to staff whose work is automated (they move to exceptions and advisory work); and how the risk thresholds are set (tuned from historical fraud data and adjusted as patterns change).</a:t>
             </a:r>
           </a:p>
@@ -747,8 +936,45 @@
 </file>
 
 <file path=ppt/slideLayouts/slideLayout1.xml><?xml version="1.0" encoding="utf-8"?>
-<p:sldLayout xmlns:a="http://schemas.openxmlformats.org/drawingml/2006/main" xmlns:r="http://schemas.openxmlformats.org/officeDocument/2006/relationships" xmlns:p="http://schemas.openxmlformats.org/presentationml/2006/main" type="blank" preserve="1">
-  <p:cSld name="Blank">
+<p:sldLayout xmlns:a="http://schemas.openxmlformats.org/drawingml/2006/main" xmlns:r="http://schemas.openxmlformats.org/officeDocument/2006/relationships" xmlns:p="http://schemas.openxmlformats.org/presentationml/2006/main" preserve="1">
+  <p:cSld name="DEFAULT">
+    <p:bg>
+      <p:bgRef idx="1001">
+        <a:schemeClr val="bg1"/>
+      </p:bgRef>
+    </p:bg>
+    <p:spTree>
+      <p:nvGrpSpPr>
+        <p:cNvPr id="1" name=""/>
+        <p:cNvGrpSpPr/>
+        <p:nvPr/>
+      </p:nvGrpSpPr>
+      <p:grpSpPr>
+        <a:xfrm>
+          <a:off x="0" y="0"/>
+          <a:ext cx="0" cy="0"/>
+          <a:chOff x="0" y="0"/>
+          <a:chExt cx="0" cy="0"/>
+        </a:xfrm>
+      </p:grpSpPr>
+    </p:spTree>
+  </p:cSld>
+  <p:clrMapOvr>
+    <a:masterClrMapping/>
+  </p:clrMapOvr>
+</p:sldLayout>
+</file>
+
+<file path=ppt/slideLayouts/slideLayout2.xml><?xml version="1.0" encoding="utf-8"?>
+<p:sldLayout xmlns:a="http://schemas.openxmlformats.org/drawingml/2006/main" xmlns:r="http://schemas.openxmlformats.org/officeDocument/2006/relationships" xmlns:p="http://schemas.openxmlformats.org/presentationml/2006/main" preserve="1">
+  <p:cSld name="BLANK">
+    <p:bg>
+      <p:bgPr>
+        <a:solidFill>
+          <a:srgbClr val="FFFFFF"/>
+        </a:solidFill>
+      </p:bgPr>
+    </p:bg>
     <p:spTree>
       <p:nvGrpSpPr>
         <p:cNvPr id="1" name=""/>
@@ -774,14 +1000,6 @@
 <file path=ppt/slideMasters/slideMaster1.xml><?xml version="1.0" encoding="utf-8"?>
 <p:sldMaster xmlns:a="http://schemas.openxmlformats.org/drawingml/2006/main" xmlns:r="http://schemas.openxmlformats.org/officeDocument/2006/relationships" xmlns:p="http://schemas.openxmlformats.org/presentationml/2006/main">
   <p:cSld>
-    <p:bg>
-      <p:bgPr>
-        <a:solidFill>
-          <a:srgbClr val="FFFFFF"/>
-        </a:solidFill>
-        <a:effectLst/>
-      </p:bgPr>
-    </p:bg>
     <p:spTree>
       <p:nvGrpSpPr>
         <p:cNvPr id="1" name=""/>
@@ -801,7 +1019,259 @@
   <p:clrMap bg1="lt1" tx1="dk1" bg2="lt2" tx2="dk2" accent1="accent1" accent2="accent2" accent3="accent3" accent4="accent4" accent5="accent5" accent6="accent6" hlink="hlink" folHlink="folHlink"/>
   <p:sldLayoutIdLst>
     <p:sldLayoutId id="2147483649" r:id="rId1"/>
+    <p:sldLayoutId id="2147483650" r:id="rId2"/>
   </p:sldLayoutIdLst>
+  <p:hf sldNum="0" hdr="0" ftr="0" dt="0"/>
+  <p:txStyles>
+    <p:titleStyle>
+      <a:lvl1pPr algn="ctr" defTabSz="914400" rtl="0" eaLnBrk="1" latinLnBrk="0" hangingPunct="1">
+        <a:spcBef>
+          <a:spcPct val="0"/>
+        </a:spcBef>
+        <a:buNone/>
+        <a:defRPr sz="4400" kern="1200">
+          <a:solidFill>
+            <a:schemeClr val="tx1"/>
+          </a:solidFill>
+          <a:latin typeface="+mj-lt"/>
+          <a:ea typeface="+mj-ea"/>
+          <a:cs typeface="+mj-cs"/>
+        </a:defRPr>
+      </a:lvl1pPr>
+    </p:titleStyle>
+    <p:bodyStyle>
+      <a:lvl1pPr marL="342900" indent="-342900" algn="l" defTabSz="914400" rtl="0" eaLnBrk="1" latinLnBrk="0" hangingPunct="1">
+        <a:spcBef>
+          <a:spcPct val="20000"/>
+        </a:spcBef>
+        <a:buFont typeface="Arial" pitchFamily="34" charset="0"/>
+        <a:buChar char="•"/>
+        <a:defRPr sz="3200" kern="1200">
+          <a:solidFill>
+            <a:schemeClr val="tx1"/>
+          </a:solidFill>
+          <a:latin typeface="+mn-lt"/>
+          <a:ea typeface="+mn-ea"/>
+          <a:cs typeface="+mn-cs"/>
+        </a:defRPr>
+      </a:lvl1pPr>
+      <a:lvl2pPr marL="742950" indent="-285750" algn="l" defTabSz="914400" rtl="0" eaLnBrk="1" latinLnBrk="0" hangingPunct="1">
+        <a:spcBef>
+          <a:spcPct val="20000"/>
+        </a:spcBef>
+        <a:buFont typeface="Arial" pitchFamily="34" charset="0"/>
+        <a:buChar char="–"/>
+        <a:defRPr sz="2800" kern="1200">
+          <a:solidFill>
+            <a:schemeClr val="tx1"/>
+          </a:solidFill>
+          <a:latin typeface="+mn-lt"/>
+          <a:ea typeface="+mn-ea"/>
+          <a:cs typeface="+mn-cs"/>
+        </a:defRPr>
+      </a:lvl2pPr>
+      <a:lvl3pPr marL="1143000" indent="-228600" algn="l" defTabSz="914400" rtl="0" eaLnBrk="1" latinLnBrk="0" hangingPunct="1">
+        <a:spcBef>
+          <a:spcPct val="20000"/>
+        </a:spcBef>
+        <a:buFont typeface="Arial" pitchFamily="34" charset="0"/>
+        <a:buChar char="•"/>
+        <a:defRPr sz="2400" kern="1200">
+          <a:solidFill>
+            <a:schemeClr val="tx1"/>
+          </a:solidFill>
+          <a:latin typeface="+mn-lt"/>
+          <a:ea typeface="+mn-ea"/>
+          <a:cs typeface="+mn-cs"/>
+        </a:defRPr>
+      </a:lvl3pPr>
+      <a:lvl4pPr marL="1600200" indent="-228600" algn="l" defTabSz="914400" rtl="0" eaLnBrk="1" latinLnBrk="0" hangingPunct="1">
+        <a:spcBef>
+          <a:spcPct val="20000"/>
+        </a:spcBef>
+        <a:buFont typeface="Arial" pitchFamily="34" charset="0"/>
+        <a:buChar char="–"/>
+        <a:defRPr sz="2000" kern="1200">
+          <a:solidFill>
+            <a:schemeClr val="tx1"/>
+          </a:solidFill>
+          <a:latin typeface="+mn-lt"/>
+          <a:ea typeface="+mn-ea"/>
+          <a:cs typeface="+mn-cs"/>
+        </a:defRPr>
+      </a:lvl4pPr>
+      <a:lvl5pPr marL="2057400" indent="-228600" algn="l" defTabSz="914400" rtl="0" eaLnBrk="1" latinLnBrk="0" hangingPunct="1">
+        <a:spcBef>
+          <a:spcPct val="20000"/>
+        </a:spcBef>
+        <a:buFont typeface="Arial" pitchFamily="34" charset="0"/>
+        <a:buChar char="»"/>
+        <a:defRPr sz="2000" kern="1200">
+          <a:solidFill>
+            <a:schemeClr val="tx1"/>
+          </a:solidFill>
+          <a:latin typeface="+mn-lt"/>
+          <a:ea typeface="+mn-ea"/>
+          <a:cs typeface="+mn-cs"/>
+        </a:defRPr>
+      </a:lvl5pPr>
+      <a:lvl6pPr marL="2514600" indent="-228600" algn="l" defTabSz="914400" rtl="0" eaLnBrk="1" latinLnBrk="0" hangingPunct="1">
+        <a:spcBef>
+          <a:spcPct val="20000"/>
+        </a:spcBef>
+        <a:buFont typeface="Arial" pitchFamily="34" charset="0"/>
+        <a:buChar char="•"/>
+        <a:defRPr sz="2000" kern="1200">
+          <a:solidFill>
+            <a:schemeClr val="tx1"/>
+          </a:solidFill>
+          <a:latin typeface="+mn-lt"/>
+          <a:ea typeface="+mn-ea"/>
+          <a:cs typeface="+mn-cs"/>
+        </a:defRPr>
+      </a:lvl6pPr>
+      <a:lvl7pPr marL="2971800" indent="-228600" algn="l" defTabSz="914400" rtl="0" eaLnBrk="1" latinLnBrk="0" hangingPunct="1">
+        <a:spcBef>
+          <a:spcPct val="20000"/>
+        </a:spcBef>
+        <a:buFont typeface="Arial" pitchFamily="34" charset="0"/>
+        <a:buChar char="•"/>
+        <a:defRPr sz="2000" kern="1200">
+          <a:solidFill>
+            <a:schemeClr val="tx1"/>
+          </a:solidFill>
+          <a:latin typeface="+mn-lt"/>
+          <a:ea typeface="+mn-ea"/>
+          <a:cs typeface="+mn-cs"/>
+        </a:defRPr>
+      </a:lvl7pPr>
+      <a:lvl8pPr marL="3429000" indent="-228600" algn="l" defTabSz="914400" rtl="0" eaLnBrk="1" latinLnBrk="0" hangingPunct="1">
+        <a:spcBef>
+          <a:spcPct val="20000"/>
+        </a:spcBef>
+        <a:buFont typeface="Arial" pitchFamily="34" charset="0"/>
+        <a:buChar char="•"/>
+        <a:defRPr sz="2000" kern="1200">
+          <a:solidFill>
+            <a:schemeClr val="tx1"/>
+          </a:solidFill>
+          <a:latin typeface="+mn-lt"/>
+          <a:ea typeface="+mn-ea"/>
+          <a:cs typeface="+mn-cs"/>
+        </a:defRPr>
+      </a:lvl8pPr>
+      <a:lvl9pPr marL="3886200" indent="-228600" algn="l" defTabSz="914400" rtl="0" eaLnBrk="1" latinLnBrk="0" hangingPunct="1">
+        <a:spcBef>
+          <a:spcPct val="20000"/>
+        </a:spcBef>
+        <a:buFont typeface="Arial" pitchFamily="34" charset="0"/>
+        <a:buChar char="•"/>
+        <a:defRPr sz="2000" kern="1200">
+          <a:solidFill>
+            <a:schemeClr val="tx1"/>
+          </a:solidFill>
+          <a:latin typeface="+mn-lt"/>
+          <a:ea typeface="+mn-ea"/>
+          <a:cs typeface="+mn-cs"/>
+        </a:defRPr>
+      </a:lvl9pPr>
+    </p:bodyStyle>
+    <p:otherStyle>
+      <a:defPPr>
+        <a:defRPr lang="en-US"/>
+      </a:defPPr>
+      <a:lvl1pPr marL="0" algn="l" defTabSz="914400" rtl="0" eaLnBrk="1" latinLnBrk="0" hangingPunct="1">
+        <a:defRPr sz="1800" kern="1200">
+          <a:solidFill>
+            <a:schemeClr val="tx1"/>
+          </a:solidFill>
+          <a:latin typeface="+mn-lt"/>
+          <a:ea typeface="+mn-ea"/>
+          <a:cs typeface="+mn-cs"/>
+        </a:defRPr>
+      </a:lvl1pPr>
+      <a:lvl2pPr marL="457200" algn="l" defTabSz="914400" rtl="0" eaLnBrk="1" latinLnBrk="0" hangingPunct="1">
+        <a:defRPr sz="1800" kern="1200">
+          <a:solidFill>
+            <a:schemeClr val="tx1"/>
+          </a:solidFill>
+          <a:latin typeface="+mn-lt"/>
+          <a:ea typeface="+mn-ea"/>
+          <a:cs typeface="+mn-cs"/>
+        </a:defRPr>
+      </a:lvl2pPr>
+      <a:lvl3pPr marL="914400" algn="l" defTabSz="914400" rtl="0" eaLnBrk="1" latinLnBrk="0" hangingPunct="1">
+        <a:defRPr sz="1800" kern="1200">
+          <a:solidFill>
+            <a:schemeClr val="tx1"/>
+          </a:solidFill>
+          <a:latin typeface="+mn-lt"/>
+          <a:ea typeface="+mn-ea"/>
+          <a:cs typeface="+mn-cs"/>
+        </a:defRPr>
+      </a:lvl3pPr>
+      <a:lvl4pPr marL="1371600" algn="l" defTabSz="914400" rtl="0" eaLnBrk="1" latinLnBrk="0" hangingPunct="1">
+        <a:defRPr sz="1800" kern="1200">
+          <a:solidFill>
+            <a:schemeClr val="tx1"/>
+          </a:solidFill>
+          <a:latin typeface="+mn-lt"/>
+          <a:ea typeface="+mn-ea"/>
+          <a:cs typeface="+mn-cs"/>
+        </a:defRPr>
+      </a:lvl4pPr>
+      <a:lvl5pPr marL="1828800" algn="l" defTabSz="914400" rtl="0" eaLnBrk="1" latinLnBrk="0" hangingPunct="1">
+        <a:defRPr sz="1800" kern="1200">
+          <a:solidFill>
+            <a:schemeClr val="tx1"/>
+          </a:solidFill>
+          <a:latin typeface="+mn-lt"/>
+          <a:ea typeface="+mn-ea"/>
+          <a:cs typeface="+mn-cs"/>
+        </a:defRPr>
+      </a:lvl5pPr>
+      <a:lvl6pPr marL="2286000" algn="l" defTabSz="914400" rtl="0" eaLnBrk="1" latinLnBrk="0" hangingPunct="1">
+        <a:defRPr sz="1800" kern="1200">
+          <a:solidFill>
+            <a:schemeClr val="tx1"/>
+          </a:solidFill>
+          <a:latin typeface="+mn-lt"/>
+          <a:ea typeface="+mn-ea"/>
+          <a:cs typeface="+mn-cs"/>
+        </a:defRPr>
+      </a:lvl6pPr>
+      <a:lvl7pPr marL="2743200" algn="l" defTabSz="914400" rtl="0" eaLnBrk="1" latinLnBrk="0" hangingPunct="1">
+        <a:defRPr sz="1800" kern="1200">
+          <a:solidFill>
+            <a:schemeClr val="tx1"/>
+          </a:solidFill>
+          <a:latin typeface="+mn-lt"/>
+          <a:ea typeface="+mn-ea"/>
+          <a:cs typeface="+mn-cs"/>
+        </a:defRPr>
+      </a:lvl7pPr>
+      <a:lvl8pPr marL="3200400" algn="l" defTabSz="914400" rtl="0" eaLnBrk="1" latinLnBrk="0" hangingPunct="1">
+        <a:defRPr sz="1800" kern="1200">
+          <a:solidFill>
+            <a:schemeClr val="tx1"/>
+          </a:solidFill>
+          <a:latin typeface="+mn-lt"/>
+          <a:ea typeface="+mn-ea"/>
+          <a:cs typeface="+mn-cs"/>
+        </a:defRPr>
+      </a:lvl8pPr>
+      <a:lvl9pPr marL="3657600" algn="l" defTabSz="914400" rtl="0" eaLnBrk="1" latinLnBrk="0" hangingPunct="1">
+        <a:defRPr sz="1800" kern="1200">
+          <a:solidFill>
+            <a:schemeClr val="tx1"/>
+          </a:solidFill>
+          <a:latin typeface="+mn-lt"/>
+          <a:ea typeface="+mn-ea"/>
+          <a:cs typeface="+mn-cs"/>
+        </a:defRPr>
+      </a:lvl9pPr>
+    </p:otherStyle>
+  </p:txStyles>
 </p:sldMaster>
 </file>
 
@@ -1017,7 +1487,7 @@
             <a:gdLst/>
             <a:ahLst/>
             <a:cxnLst/>
-            <a:rect l="0" t="0" r="r" b="b"/>
+            <a:rect l="l" t="t" r="r" b="b"/>
             <a:pathLst>
               <a:path w="1000" h="1160">
                 <a:moveTo>
@@ -1080,7 +1550,7 @@
             <a:gdLst/>
             <a:ahLst/>
             <a:cxnLst/>
-            <a:rect l="0" t="0" r="r" b="b"/>
+            <a:rect l="l" t="t" r="r" b="b"/>
             <a:pathLst>
               <a:path w="1000" h="1160">
                 <a:moveTo>
@@ -1143,7 +1613,7 @@
             <a:gdLst/>
             <a:ahLst/>
             <a:cxnLst/>
-            <a:rect l="0" t="0" r="r" b="b"/>
+            <a:rect l="l" t="t" r="r" b="b"/>
             <a:pathLst>
               <a:path w="100" h="140">
                 <a:moveTo>
@@ -1263,7 +1733,7 @@
             <a:gdLst/>
             <a:ahLst/>
             <a:cxnLst/>
-            <a:rect l="0" t="0" r="r" b="b"/>
+            <a:rect l="l" t="t" r="r" b="b"/>
             <a:pathLst>
               <a:path w="100" h="62">
                 <a:moveTo>
@@ -1315,7 +1785,7 @@
             <a:gdLst/>
             <a:ahLst/>
             <a:cxnLst/>
-            <a:rect l="0" t="0" r="r" b="b"/>
+            <a:rect l="l" t="t" r="r" b="b"/>
             <a:pathLst>
               <a:path w="100" h="62">
                 <a:moveTo>
@@ -1398,7 +1868,7 @@
             <a:gdLst/>
             <a:ahLst/>
             <a:cxnLst/>
-            <a:rect l="0" t="0" r="r" b="b"/>
+            <a:rect l="l" t="t" r="r" b="b"/>
             <a:pathLst>
               <a:path w="1000" h="100">
                 <a:moveTo>
@@ -2280,7 +2750,7 @@
             <a:gdLst/>
             <a:ahLst/>
             <a:cxnLst/>
-            <a:rect l="0" t="0" r="r" b="b"/>
+            <a:rect l="l" t="t" r="r" b="b"/>
             <a:pathLst>
               <a:path w="1000" h="1160">
                 <a:moveTo>
@@ -2343,7 +2813,7 @@
             <a:gdLst/>
             <a:ahLst/>
             <a:cxnLst/>
-            <a:rect l="0" t="0" r="r" b="b"/>
+            <a:rect l="l" t="t" r="r" b="b"/>
             <a:pathLst>
               <a:path w="1000" h="1160">
                 <a:moveTo>
@@ -2406,7 +2876,7 @@
             <a:gdLst/>
             <a:ahLst/>
             <a:cxnLst/>
-            <a:rect l="0" t="0" r="r" b="b"/>
+            <a:rect l="l" t="t" r="r" b="b"/>
             <a:pathLst>
               <a:path w="100" h="140">
                 <a:moveTo>
@@ -2526,7 +2996,7 @@
             <a:gdLst/>
             <a:ahLst/>
             <a:cxnLst/>
-            <a:rect l="0" t="0" r="r" b="b"/>
+            <a:rect l="l" t="t" r="r" b="b"/>
             <a:pathLst>
               <a:path w="100" h="62">
                 <a:moveTo>
@@ -2578,7 +3048,7 @@
             <a:gdLst/>
             <a:ahLst/>
             <a:cxnLst/>
-            <a:rect l="0" t="0" r="r" b="b"/>
+            <a:rect l="l" t="t" r="r" b="b"/>
             <a:pathLst>
               <a:path w="100" h="62">
                 <a:moveTo>
@@ -2661,7 +3131,7 @@
             <a:gdLst/>
             <a:ahLst/>
             <a:cxnLst/>
-            <a:rect l="0" t="0" r="r" b="b"/>
+            <a:rect l="l" t="t" r="r" b="b"/>
             <a:pathLst>
               <a:path w="1000" h="100">
                 <a:moveTo>
@@ -4616,7 +5086,7 @@
             <a:gdLst/>
             <a:ahLst/>
             <a:cxnLst/>
-            <a:rect l="0" t="0" r="r" b="b"/>
+            <a:rect l="l" t="t" r="r" b="b"/>
             <a:pathLst>
               <a:path w="1000" h="1160">
                 <a:moveTo>
@@ -4679,7 +5149,7 @@
             <a:gdLst/>
             <a:ahLst/>
             <a:cxnLst/>
-            <a:rect l="0" t="0" r="r" b="b"/>
+            <a:rect l="l" t="t" r="r" b="b"/>
             <a:pathLst>
               <a:path w="1000" h="1160">
                 <a:moveTo>
@@ -4742,7 +5212,7 @@
             <a:gdLst/>
             <a:ahLst/>
             <a:cxnLst/>
-            <a:rect l="0" t="0" r="r" b="b"/>
+            <a:rect l="l" t="t" r="r" b="b"/>
             <a:pathLst>
               <a:path w="100" h="140">
                 <a:moveTo>
@@ -4862,7 +5332,7 @@
             <a:gdLst/>
             <a:ahLst/>
             <a:cxnLst/>
-            <a:rect l="0" t="0" r="r" b="b"/>
+            <a:rect l="l" t="t" r="r" b="b"/>
             <a:pathLst>
               <a:path w="100" h="62">
                 <a:moveTo>
@@ -4914,7 +5384,7 @@
             <a:gdLst/>
             <a:ahLst/>
             <a:cxnLst/>
-            <a:rect l="0" t="0" r="r" b="b"/>
+            <a:rect l="l" t="t" r="r" b="b"/>
             <a:pathLst>
               <a:path w="100" h="62">
                 <a:moveTo>
@@ -4997,7 +5467,7 @@
             <a:gdLst/>
             <a:ahLst/>
             <a:cxnLst/>
-            <a:rect l="0" t="0" r="r" b="b"/>
+            <a:rect l="l" t="t" r="r" b="b"/>
             <a:pathLst>
               <a:path w="1000" h="100">
                 <a:moveTo>
@@ -6734,7 +7204,7 @@
             <a:gdLst/>
             <a:ahLst/>
             <a:cxnLst/>
-            <a:rect l="0" t="0" r="r" b="b"/>
+            <a:rect l="l" t="t" r="r" b="b"/>
             <a:pathLst>
               <a:path w="1000" h="1160">
                 <a:moveTo>
@@ -6797,7 +7267,7 @@
             <a:gdLst/>
             <a:ahLst/>
             <a:cxnLst/>
-            <a:rect l="0" t="0" r="r" b="b"/>
+            <a:rect l="l" t="t" r="r" b="b"/>
             <a:pathLst>
               <a:path w="1000" h="1160">
                 <a:moveTo>
@@ -6860,7 +7330,7 @@
             <a:gdLst/>
             <a:ahLst/>
             <a:cxnLst/>
-            <a:rect l="0" t="0" r="r" b="b"/>
+            <a:rect l="l" t="t" r="r" b="b"/>
             <a:pathLst>
               <a:path w="100" h="140">
                 <a:moveTo>
@@ -6980,7 +7450,7 @@
             <a:gdLst/>
             <a:ahLst/>
             <a:cxnLst/>
-            <a:rect l="0" t="0" r="r" b="b"/>
+            <a:rect l="l" t="t" r="r" b="b"/>
             <a:pathLst>
               <a:path w="100" h="62">
                 <a:moveTo>
@@ -7032,7 +7502,7 @@
             <a:gdLst/>
             <a:ahLst/>
             <a:cxnLst/>
-            <a:rect l="0" t="0" r="r" b="b"/>
+            <a:rect l="l" t="t" r="r" b="b"/>
             <a:pathLst>
               <a:path w="100" h="62">
                 <a:moveTo>
@@ -7115,7 +7585,7 @@
             <a:gdLst/>
             <a:ahLst/>
             <a:cxnLst/>
-            <a:rect l="0" t="0" r="r" b="b"/>
+            <a:rect l="l" t="t" r="r" b="b"/>
             <a:pathLst>
               <a:path w="1000" h="100">
                 <a:moveTo>
@@ -8649,7 +9119,7 @@
             <a:gdLst/>
             <a:ahLst/>
             <a:cxnLst/>
-            <a:rect l="0" t="0" r="r" b="b"/>
+            <a:rect l="l" t="t" r="r" b="b"/>
             <a:pathLst>
               <a:path w="1000" h="1160">
                 <a:moveTo>
@@ -8712,7 +9182,7 @@
             <a:gdLst/>
             <a:ahLst/>
             <a:cxnLst/>
-            <a:rect l="0" t="0" r="r" b="b"/>
+            <a:rect l="l" t="t" r="r" b="b"/>
             <a:pathLst>
               <a:path w="1000" h="1160">
                 <a:moveTo>
@@ -8775,7 +9245,7 @@
             <a:gdLst/>
             <a:ahLst/>
             <a:cxnLst/>
-            <a:rect l="0" t="0" r="r" b="b"/>
+            <a:rect l="l" t="t" r="r" b="b"/>
             <a:pathLst>
               <a:path w="100" h="140">
                 <a:moveTo>
@@ -8895,7 +9365,7 @@
             <a:gdLst/>
             <a:ahLst/>
             <a:cxnLst/>
-            <a:rect l="0" t="0" r="r" b="b"/>
+            <a:rect l="l" t="t" r="r" b="b"/>
             <a:pathLst>
               <a:path w="100" h="62">
                 <a:moveTo>
@@ -8947,7 +9417,7 @@
             <a:gdLst/>
             <a:ahLst/>
             <a:cxnLst/>
-            <a:rect l="0" t="0" r="r" b="b"/>
+            <a:rect l="l" t="t" r="r" b="b"/>
             <a:pathLst>
               <a:path w="100" h="62">
                 <a:moveTo>
@@ -9030,7 +9500,7 @@
             <a:gdLst/>
             <a:ahLst/>
             <a:cxnLst/>
-            <a:rect l="0" t="0" r="r" b="b"/>
+            <a:rect l="l" t="t" r="r" b="b"/>
             <a:pathLst>
               <a:path w="1000" h="100">
                 <a:moveTo>
@@ -11490,7 +11960,7 @@
             <a:gdLst/>
             <a:ahLst/>
             <a:cxnLst/>
-            <a:rect l="0" t="0" r="r" b="b"/>
+            <a:rect l="l" t="t" r="r" b="b"/>
             <a:pathLst>
               <a:path w="1000" h="1160">
                 <a:moveTo>
@@ -11553,7 +12023,7 @@
             <a:gdLst/>
             <a:ahLst/>
             <a:cxnLst/>
-            <a:rect l="0" t="0" r="r" b="b"/>
+            <a:rect l="l" t="t" r="r" b="b"/>
             <a:pathLst>
               <a:path w="1000" h="1160">
                 <a:moveTo>
@@ -11616,7 +12086,7 @@
             <a:gdLst/>
             <a:ahLst/>
             <a:cxnLst/>
-            <a:rect l="0" t="0" r="r" b="b"/>
+            <a:rect l="l" t="t" r="r" b="b"/>
             <a:pathLst>
               <a:path w="100" h="140">
                 <a:moveTo>
@@ -11736,7 +12206,7 @@
             <a:gdLst/>
             <a:ahLst/>
             <a:cxnLst/>
-            <a:rect l="0" t="0" r="r" b="b"/>
+            <a:rect l="l" t="t" r="r" b="b"/>
             <a:pathLst>
               <a:path w="100" h="62">
                 <a:moveTo>
@@ -11788,7 +12258,7 @@
             <a:gdLst/>
             <a:ahLst/>
             <a:cxnLst/>
-            <a:rect l="0" t="0" r="r" b="b"/>
+            <a:rect l="l" t="t" r="r" b="b"/>
             <a:pathLst>
               <a:path w="100" h="62">
                 <a:moveTo>
@@ -11871,7 +12341,7 @@
             <a:gdLst/>
             <a:ahLst/>
             <a:cxnLst/>
-            <a:rect l="0" t="0" r="r" b="b"/>
+            <a:rect l="l" t="t" r="r" b="b"/>
             <a:pathLst>
               <a:path w="1000" h="100">
                 <a:moveTo>
@@ -13655,92 +14125,231 @@
 </file>
 
 <file path=ppt/theme/theme1.xml><?xml version="1.0" encoding="utf-8"?>
-<a:theme xmlns:a="http://schemas.openxmlformats.org/drawingml/2006/main" name="ISSM Crimson Gold">
+<a:theme xmlns:a="http://schemas.openxmlformats.org/drawingml/2006/main" name="Office Theme">
   <a:themeElements>
-    <a:clrScheme name="ISSM">
+    <a:clrScheme name="Office">
       <a:dk1>
-        <a:srgbClr val="22222A"/>
+        <a:sysClr val="windowText" lastClr="000000"/>
       </a:dk1>
       <a:lt1>
-        <a:srgbClr val="FFFFFF"/>
+        <a:sysClr val="window" lastClr="FFFFFF"/>
       </a:lt1>
       <a:dk2>
-        <a:srgbClr val="5E0B15"/>
+        <a:srgbClr val="44546A"/>
       </a:dk2>
       <a:lt2>
-        <a:srgbClr val="FCFAF6"/>
+        <a:srgbClr val="E7E6E6"/>
       </a:lt2>
       <a:accent1>
-        <a:srgbClr val="9E1B32"/>
+        <a:srgbClr val="4472C4"/>
       </a:accent1>
       <a:accent2>
-        <a:srgbClr val="C9A227"/>
+        <a:srgbClr val="ED7D31"/>
       </a:accent2>
       <a:accent3>
-        <a:srgbClr val="B02338"/>
+        <a:srgbClr val="A5A5A5"/>
       </a:accent3>
       <a:accent4>
-        <a:srgbClr val="E3C567"/>
+        <a:srgbClr val="FFC000"/>
       </a:accent4>
       <a:accent5>
-        <a:srgbClr val="7A7A85"/>
+        <a:srgbClr val="5B9BD5"/>
       </a:accent5>
       <a:accent6>
-        <a:srgbClr val="1E7A4D"/>
+        <a:srgbClr val="70AD47"/>
       </a:accent6>
       <a:hlink>
-        <a:srgbClr val="9E1B32"/>
+        <a:srgbClr val="0563C1"/>
       </a:hlink>
       <a:folHlink>
-        <a:srgbClr val="C9A227"/>
+        <a:srgbClr val="954F72"/>
       </a:folHlink>
     </a:clrScheme>
-    <a:fontScheme name="ISSM">
+    <a:fontScheme name="Office">
       <a:majorFont>
-        <a:latin typeface="Georgia"/>
+        <a:latin typeface="Calibri Light" panose="020F0302020204030204"/>
         <a:ea typeface=""/>
         <a:cs typeface=""/>
+        <a:font script="Jpan" typeface="游ゴシック Light"/>
+        <a:font script="Hang" typeface="맑은 고딕"/>
+        <a:font script="Hans" typeface="等线 Light"/>
+        <a:font script="Hant" typeface="新細明體"/>
+        <a:font script="Arab" typeface="Times New Roman"/>
+        <a:font script="Hebr" typeface="Times New Roman"/>
+        <a:font script="Thai" typeface="Angsana New"/>
+        <a:font script="Ethi" typeface="Nyala"/>
+        <a:font script="Beng" typeface="Vrinda"/>
+        <a:font script="Gujr" typeface="Shruti"/>
+        <a:font script="Khmr" typeface="MoolBoran"/>
+        <a:font script="Knda" typeface="Tunga"/>
+        <a:font script="Guru" typeface="Raavi"/>
+        <a:font script="Cans" typeface="Euphemia"/>
+        <a:font script="Cher" typeface="Plantagenet Cherokee"/>
+        <a:font script="Yiii" typeface="Microsoft Yi Baiti"/>
+        <a:font script="Tibt" typeface="Microsoft Himalaya"/>
+        <a:font script="Thaa" typeface="MV Boli"/>
+        <a:font script="Deva" typeface="Mangal"/>
+        <a:font script="Telu" typeface="Gautami"/>
+        <a:font script="Taml" typeface="Latha"/>
+        <a:font script="Syrc" typeface="Estrangelo Edessa"/>
+        <a:font script="Orya" typeface="Kalinga"/>
+        <a:font script="Mlym" typeface="Kartika"/>
+        <a:font script="Laoo" typeface="DokChampa"/>
+        <a:font script="Sinh" typeface="Iskoola Pota"/>
+        <a:font script="Mong" typeface="Mongolian Baiti"/>
+        <a:font script="Viet" typeface="Times New Roman"/>
+        <a:font script="Uigh" typeface="Microsoft Uighur"/>
+        <a:font script="Geor" typeface="Sylfaen"/>
+        <a:font script="Armn" typeface="Arial"/>
+        <a:font script="Bugi" typeface="Leelawadee UI"/>
+        <a:font script="Bopo" typeface="Microsoft JhengHei"/>
+        <a:font script="Java" typeface="Javanese Text"/>
+        <a:font script="Lisu" typeface="Segoe UI"/>
+        <a:font script="Mymr" typeface="Myanmar Text"/>
+        <a:font script="Nkoo" typeface="Ebrima"/>
+        <a:font script="Olck" typeface="Nirmala UI"/>
+        <a:font script="Osma" typeface="Ebrima"/>
+        <a:font script="Phag" typeface="Phagspa"/>
+        <a:font script="Syrn" typeface="Estrangelo Edessa"/>
+        <a:font script="Syrj" typeface="Estrangelo Edessa"/>
+        <a:font script="Syre" typeface="Estrangelo Edessa"/>
+        <a:font script="Sora" typeface="Nirmala UI"/>
+        <a:font script="Tale" typeface="Microsoft Tai Le"/>
+        <a:font script="Talu" typeface="Microsoft New Tai Lue"/>
+        <a:font script="Tfng" typeface="Ebrima"/>
       </a:majorFont>
       <a:minorFont>
-        <a:latin typeface="Calibri"/>
+        <a:latin typeface="Calibri" panose="020F0502020204030204"/>
         <a:ea typeface=""/>
         <a:cs typeface=""/>
+        <a:font script="Jpan" typeface="游ゴシック"/>
+        <a:font script="Hang" typeface="맑은 고딕"/>
+        <a:font script="Hans" typeface="等线"/>
+        <a:font script="Hant" typeface="新細明體"/>
+        <a:font script="Arab" typeface="Arial"/>
+        <a:font script="Hebr" typeface="Arial"/>
+        <a:font script="Thai" typeface="Cordia New"/>
+        <a:font script="Ethi" typeface="Nyala"/>
+        <a:font script="Beng" typeface="Vrinda"/>
+        <a:font script="Gujr" typeface="Shruti"/>
+        <a:font script="Khmr" typeface="DaunPenh"/>
+        <a:font script="Knda" typeface="Tunga"/>
+        <a:font script="Guru" typeface="Raavi"/>
+        <a:font script="Cans" typeface="Euphemia"/>
+        <a:font script="Cher" typeface="Plantagenet Cherokee"/>
+        <a:font script="Yiii" typeface="Microsoft Yi Baiti"/>
+        <a:font script="Tibt" typeface="Microsoft Himalaya"/>
+        <a:font script="Thaa" typeface="MV Boli"/>
+        <a:font script="Deva" typeface="Mangal"/>
+        <a:font script="Telu" typeface="Gautami"/>
+        <a:font script="Taml" typeface="Latha"/>
+        <a:font script="Syrc" typeface="Estrangelo Edessa"/>
+        <a:font script="Orya" typeface="Kalinga"/>
+        <a:font script="Mlym" typeface="Kartika"/>
+        <a:font script="Laoo" typeface="DokChampa"/>
+        <a:font script="Sinh" typeface="Iskoola Pota"/>
+        <a:font script="Mong" typeface="Mongolian Baiti"/>
+        <a:font script="Viet" typeface="Arial"/>
+        <a:font script="Uigh" typeface="Microsoft Uighur"/>
+        <a:font script="Geor" typeface="Sylfaen"/>
+        <a:font script="Armn" typeface="Arial"/>
+        <a:font script="Bugi" typeface="Leelawadee UI"/>
+        <a:font script="Bopo" typeface="Microsoft JhengHei"/>
+        <a:font script="Java" typeface="Javanese Text"/>
+        <a:font script="Lisu" typeface="Segoe UI"/>
+        <a:font script="Mymr" typeface="Myanmar Text"/>
+        <a:font script="Nkoo" typeface="Ebrima"/>
+        <a:font script="Olck" typeface="Nirmala UI"/>
+        <a:font script="Osma" typeface="Ebrima"/>
+        <a:font script="Phag" typeface="Phagspa"/>
+        <a:font script="Syrn" typeface="Estrangelo Edessa"/>
+        <a:font script="Syrj" typeface="Estrangelo Edessa"/>
+        <a:font script="Syre" typeface="Estrangelo Edessa"/>
+        <a:font script="Sora" typeface="Nirmala UI"/>
+        <a:font script="Tale" typeface="Microsoft Tai Le"/>
+        <a:font script="Talu" typeface="Microsoft New Tai Lue"/>
+        <a:font script="Tfng" typeface="Ebrima"/>
       </a:minorFont>
     </a:fontScheme>
-    <a:fmtScheme name="ISSM">
+    <a:fmtScheme name="Office">
       <a:fillStyleLst>
         <a:solidFill>
           <a:schemeClr val="phClr"/>
         </a:solidFill>
-        <a:solidFill>
-          <a:schemeClr val="phClr">
-            <a:tint val="60000"/>
-          </a:schemeClr>
-        </a:solidFill>
-        <a:solidFill>
-          <a:schemeClr val="phClr">
-            <a:shade val="80000"/>
-          </a:schemeClr>
-        </a:solidFill>
+        <a:gradFill rotWithShape="1">
+          <a:gsLst>
+            <a:gs pos="0">
+              <a:schemeClr val="phClr">
+                <a:lumMod val="110000"/>
+                <a:satMod val="105000"/>
+                <a:tint val="67000"/>
+              </a:schemeClr>
+            </a:gs>
+            <a:gs pos="50000">
+              <a:schemeClr val="phClr">
+                <a:lumMod val="105000"/>
+                <a:satMod val="103000"/>
+                <a:tint val="73000"/>
+              </a:schemeClr>
+            </a:gs>
+            <a:gs pos="100000">
+              <a:schemeClr val="phClr">
+                <a:lumMod val="105000"/>
+                <a:satMod val="109000"/>
+                <a:tint val="81000"/>
+              </a:schemeClr>
+            </a:gs>
+          </a:gsLst>
+          <a:lin ang="5400000" scaled="0"/>
+        </a:gradFill>
+        <a:gradFill rotWithShape="1">
+          <a:gsLst>
+            <a:gs pos="0">
+              <a:schemeClr val="phClr">
+                <a:satMod val="103000"/>
+                <a:lumMod val="102000"/>
+                <a:tint val="94000"/>
+              </a:schemeClr>
+            </a:gs>
+            <a:gs pos="50000">
+              <a:schemeClr val="phClr">
+                <a:satMod val="110000"/>
+                <a:lumMod val="100000"/>
+                <a:shade val="100000"/>
+              </a:schemeClr>
+            </a:gs>
+            <a:gs pos="100000">
+              <a:schemeClr val="phClr">
+                <a:lumMod val="99000"/>
+                <a:satMod val="120000"/>
+                <a:shade val="78000"/>
+              </a:schemeClr>
+            </a:gs>
+          </a:gsLst>
+          <a:lin ang="5400000" scaled="0"/>
+        </a:gradFill>
       </a:fillStyleLst>
       <a:lnStyleLst>
-        <a:ln w="9525" cap="flat" cmpd="sng" algn="ctr">
+        <a:ln w="6350" cap="flat" cmpd="sng" algn="ctr">
           <a:solidFill>
             <a:schemeClr val="phClr"/>
           </a:solidFill>
           <a:prstDash val="solid"/>
+          <a:miter lim="800000"/>
         </a:ln>
-        <a:ln w="15875" cap="flat" cmpd="sng" algn="ctr">
+        <a:ln w="12700" cap="flat" cmpd="sng" algn="ctr">
           <a:solidFill>
             <a:schemeClr val="phClr"/>
           </a:solidFill>
           <a:prstDash val="solid"/>
+          <a:miter lim="800000"/>
         </a:ln>
-        <a:ln w="25400" cap="flat" cmpd="sng" algn="ctr">
+        <a:ln w="19050" cap="flat" cmpd="sng" algn="ctr">
           <a:solidFill>
             <a:schemeClr val="phClr"/>
           </a:solidFill>
           <a:prstDash val="solid"/>
+          <a:miter lim="800000"/>
         </a:ln>
       </a:lnStyleLst>
       <a:effectStyleLst>
@@ -13751,7 +14360,13 @@
           <a:effectLst/>
         </a:effectStyle>
         <a:effectStyle>
-          <a:effectLst/>
+          <a:effectLst>
+            <a:outerShdw blurRad="57150" dist="19050" dir="5400000" algn="ctr" rotWithShape="0">
+              <a:srgbClr val="000000">
+                <a:alpha val="63000"/>
+              </a:srgbClr>
+            </a:outerShdw>
+          </a:effectLst>
         </a:effectStyle>
       </a:effectStyleLst>
       <a:bgFillStyleLst>
@@ -13761,17 +14376,45 @@
         <a:solidFill>
           <a:schemeClr val="phClr">
             <a:tint val="95000"/>
+            <a:satMod val="170000"/>
           </a:schemeClr>
         </a:solidFill>
-        <a:solidFill>
-          <a:schemeClr val="phClr">
-            <a:shade val="90000"/>
-          </a:schemeClr>
-        </a:solidFill>
+        <a:gradFill rotWithShape="1">
+          <a:gsLst>
+            <a:gs pos="0">
+              <a:schemeClr val="phClr">
+                <a:tint val="93000"/>
+                <a:satMod val="150000"/>
+                <a:shade val="98000"/>
+                <a:lumMod val="102000"/>
+              </a:schemeClr>
+            </a:gs>
+            <a:gs pos="50000">
+              <a:schemeClr val="phClr">
+                <a:tint val="98000"/>
+                <a:satMod val="130000"/>
+                <a:shade val="90000"/>
+                <a:lumMod val="103000"/>
+              </a:schemeClr>
+            </a:gs>
+            <a:gs pos="100000">
+              <a:schemeClr val="phClr">
+                <a:shade val="63000"/>
+                <a:satMod val="120000"/>
+              </a:schemeClr>
+            </a:gs>
+          </a:gsLst>
+          <a:lin ang="5400000" scaled="0"/>
+        </a:gradFill>
       </a:bgFillStyleLst>
     </a:fmtScheme>
   </a:themeElements>
   <a:objectDefaults/>
   <a:extraClrSchemeLst/>
+  <a:extLst>
+    <a:ext uri="{05A4C25C-085E-4340-85A3-A5531E510DB2}">
+      <thm15:themeFamily xmlns:thm15="http://schemas.microsoft.com/office/thememl/2012/main" name="Office Theme" id="{62F939B6-93AF-4DB8-9C6B-D6C7DFDC589F}" vid="{4A3C46E8-61CC-4603-A589-7422A47A8E4A}"/>
+    </a:ext>
+  </a:extLst>
 </a:theme>
 </file>